--- a/Healthbuddy_IIT_Kanpur/docs/GlucoTwin_Presentation.pptx
+++ b/Healthbuddy_IIT_Kanpur/docs/GlucoTwin_Presentation.pptx
@@ -146,7 +146,7 @@
               </a:defRPr>
             </a:pPr>
             <a:r>
-              <a:rPr sz="1200" b="0" i="0" u="none" strike="noStrike">
+              <a:rPr lang="en-US" sz="1200" b="0" i="0" u="none" strike="noStrike">
                 <a:solidFill>
                   <a:srgbClr val="12343B"/>
                 </a:solidFill>
@@ -323,22 +323,22 @@
                 <c:formatCode>0.000</c:formatCode>
                 <c:ptCount val="6"/>
                 <c:pt idx="0">
-                  <c:v>0.665</c:v>
+                  <c:v>0.66500000000000004</c:v>
                 </c:pt>
                 <c:pt idx="1">
-                  <c:v>0.916</c:v>
+                  <c:v>0.91600000000000004</c:v>
                 </c:pt>
                 <c:pt idx="2">
-                  <c:v>0.927</c:v>
+                  <c:v>0.92700000000000005</c:v>
                 </c:pt>
                 <c:pt idx="3">
-                  <c:v>0.924</c:v>
+                  <c:v>0.92400000000000004</c:v>
                 </c:pt>
                 <c:pt idx="4">
-                  <c:v>0.928</c:v>
+                  <c:v>0.92800000000000005</c:v>
                 </c:pt>
                 <c:pt idx="5">
-                  <c:v>0.934</c:v>
+                  <c:v>0.93400000000000005</c:v>
                 </c:pt>
               </c:numCache>
             </c:numRef>
@@ -3792,11 +3792,10 @@
             <a:endParaRPr lang="en-US" sz="1400" dirty="0"/>
           </a:p>
           <a:p>
-            <a:pPr marL="0" indent="0">
+            <a:pPr>
               <a:spcAft>
                 <a:spcPts val="400"/>
               </a:spcAft>
-              <a:buNone/>
             </a:pPr>
             <a:r>
               <a:rPr lang="en-US" sz="1400" dirty="0">
@@ -3807,7 +3806,7 @@
                 <a:ea typeface="Calibri" pitchFamily="34" charset="-122"/>
                 <a:cs typeface="Calibri" pitchFamily="34" charset="-120"/>
               </a:rPr>
-              <a:t>Code, data generator, models, dashboard: [GitHub repository link]</a:t>
+              <a:t>Code, data generator, models, dashboard: https://github.com/Anshika-Si/Healthbuddy_IIT_Kanpur</a:t>
             </a:r>
             <a:endParaRPr lang="en-US" sz="1400" dirty="0"/>
           </a:p>
@@ -6830,8 +6829,8 @@
         </p:blipFill>
         <p:spPr>
           <a:xfrm>
-            <a:off x="457200" y="868680"/>
-            <a:ext cx="8229600" cy="3886200"/>
+            <a:off x="190499" y="647700"/>
+            <a:ext cx="8697557" cy="4107180"/>
           </a:xfrm>
           <a:prstGeom prst="rect">
             <a:avLst/>
@@ -8090,6 +8089,13 @@
             <a:prstDash val="solid"/>
           </a:ln>
         </p:spPr>
+        <p:txBody>
+          <a:bodyPr/>
+          <a:lstStyle/>
+          <a:p>
+            <a:endParaRPr/>
+          </a:p>
+        </p:txBody>
       </p:sp>
       <p:sp>
         <p:nvSpPr>
@@ -8269,7 +8275,7 @@
                 <a:ea typeface="Calibri" pitchFamily="34" charset="-122"/>
                 <a:cs typeface="Calibri" pitchFamily="34" charset="-120"/>
               </a:rPr>
-              <a:t>Her lunch was never logged, yet she peaked at 259, inside the predicted 193–275 range. The twin knew her routine.</a:t>
+              <a:t>Her lunch was never logged, yet she peaked at 259, inside the predicted 193–272 range. The twin knew her routine.</a:t>
             </a:r>
             <a:endParaRPr lang="en-US" sz="1250" dirty="0"/>
           </a:p>
